--- a/Web/Vue-Notes.pptx
+++ b/Web/Vue-Notes.pptx
@@ -17074,11 +17074,13 @@
         <p:spPr>
           <a:xfrm>
             <a:off x="838200" y="1211580"/>
-            <a:ext cx="5423535" cy="4549140"/>
+            <a:ext cx="5423535" cy="5343525"/>
           </a:xfrm>
         </p:spPr>
         <p:txBody>
-          <a:bodyPr/>
+          <a:bodyPr>
+            <a:normAutofit fontScale="80000"/>
+          </a:bodyPr>
           <a:p>
             <a:r>
               <a:rPr lang="en-US" altLang="zh-CN"/>
@@ -17099,6 +17101,102 @@
             <a:r>
               <a:rPr lang="en-US" altLang="zh-CN"/>
               <a:t>pnpm add terser -D</a:t>
+            </a:r>
+            <a:endParaRPr lang="en-US" altLang="zh-CN"/>
+          </a:p>
+          <a:p>
+            <a:pPr lvl="0"/>
+            <a:r>
+              <a:rPr lang="en-US" altLang="zh-CN"/>
+              <a:t>minifiers</a:t>
+            </a:r>
+            <a:endParaRPr lang="en-US" altLang="zh-CN"/>
+          </a:p>
+          <a:p>
+            <a:pPr lvl="1"/>
+            <a:r>
+              <a:rPr lang="en-US" altLang="zh-CN"/>
+              <a:t>esbuild</a:t>
+            </a:r>
+            <a:endParaRPr lang="en-US" altLang="zh-CN"/>
+          </a:p>
+          <a:p>
+            <a:pPr lvl="2"/>
+            <a:r>
+              <a:rPr lang="en-US" altLang="zh-CN"/>
+              <a:t>default, fast, but fewer options</a:t>
+            </a:r>
+            <a:endParaRPr lang="en-US" altLang="zh-CN"/>
+          </a:p>
+          <a:p>
+            <a:pPr lvl="1"/>
+            <a:r>
+              <a:rPr lang="en-US" altLang="zh-CN"/>
+              <a:t>terser</a:t>
+            </a:r>
+            <a:endParaRPr lang="en-US" altLang="zh-CN"/>
+          </a:p>
+          <a:p>
+            <a:pPr lvl="2"/>
+            <a:r>
+              <a:rPr lang="en-US" altLang="zh-CN"/>
+              <a:t>slower, but more configurable, and supports advanced options like drop_console</a:t>
+            </a:r>
+            <a:endParaRPr lang="en-US" altLang="zh-CN"/>
+          </a:p>
+          <a:p>
+            <a:pPr lvl="0"/>
+            <a:r>
+              <a:rPr lang="en-US" altLang="zh-CN"/>
+              <a:t>Dev mode</a:t>
+            </a:r>
+            <a:endParaRPr lang="en-US" altLang="zh-CN"/>
+          </a:p>
+          <a:p>
+            <a:pPr lvl="1"/>
+            <a:r>
+              <a:rPr lang="en-US" altLang="zh-CN"/>
+              <a:t>vite.config.js</a:t>
+            </a:r>
+            <a:endParaRPr lang="en-US" altLang="zh-CN"/>
+          </a:p>
+          <a:p>
+            <a:pPr lvl="2"/>
+            <a:r>
+              <a:rPr lang="en-US" altLang="zh-CN"/>
+              <a:t>server-&gt;proxy: changeOrigin: true, secure: false, cookieDomainRewrite: ‘’</a:t>
+            </a:r>
+            <a:endParaRPr lang="en-US" altLang="zh-CN"/>
+          </a:p>
+          <a:p>
+            <a:pPr lvl="1"/>
+            <a:r>
+              <a:rPr lang="en-US" altLang="zh-CN"/>
+              <a:t>api should starts with “http://localhost/” instead of remote server ip</a:t>
+            </a:r>
+            <a:endParaRPr lang="en-US" altLang="zh-CN"/>
+          </a:p>
+          <a:p>
+            <a:pPr lvl="1"/>
+            <a:r>
+              <a:rPr lang="en-US" altLang="zh-CN"/>
+              <a:t>axios.defaults.withCredentials = true</a:t>
+            </a:r>
+            <a:endParaRPr lang="en-US" altLang="zh-CN"/>
+          </a:p>
+          <a:p>
+            <a:pPr lvl="1"/>
+            <a:r>
+              <a:rPr lang="en-US" altLang="zh-CN"/>
+              <a:t>to make codes only run in dev mode</a:t>
+            </a:r>
+            <a:endParaRPr lang="en-US" altLang="zh-CN"/>
+          </a:p>
+          <a:p>
+            <a:pPr lvl="2"/>
+            <a:r>
+              <a:rPr lang="en-US" altLang="zh-CN"/>
+              <a:t>if (import.meta.env.DEV) {}</a:t>
             </a:r>
             <a:endParaRPr lang="en-US" altLang="zh-CN"/>
           </a:p>
@@ -17113,7 +17211,7 @@
         <p:spPr>
           <a:xfrm>
             <a:off x="7061835" y="1226185"/>
-            <a:ext cx="4060190" cy="3415030"/>
+            <a:ext cx="4060190" cy="5631180"/>
           </a:xfrm>
           <a:prstGeom prst="rect">
             <a:avLst/>
@@ -17164,6 +17262,90 @@
             <a:r>
               <a:rPr lang="en-US" altLang="zh-CN" sz="1200"/>
               <a:t>  plugins: [vue()],</a:t>
+            </a:r>
+            <a:endParaRPr lang="en-US" altLang="zh-CN" sz="1200"/>
+          </a:p>
+          <a:p>
+            <a:r>
+              <a:rPr lang="en-US" altLang="zh-CN" sz="1200"/>
+              <a:t>    server: {</a:t>
+            </a:r>
+            <a:endParaRPr lang="en-US" altLang="zh-CN" sz="1200"/>
+          </a:p>
+          <a:p>
+            <a:r>
+              <a:rPr lang="en-US" altLang="zh-CN" sz="1200"/>
+              <a:t>      proxy: {</a:t>
+            </a:r>
+            <a:endParaRPr lang="en-US" altLang="zh-CN" sz="1200"/>
+          </a:p>
+          <a:p>
+            <a:r>
+              <a:rPr lang="en-US" altLang="zh-CN" sz="1200"/>
+              <a:t>        '/api': {</a:t>
+            </a:r>
+            <a:endParaRPr lang="en-US" altLang="zh-CN" sz="1200"/>
+          </a:p>
+          <a:p>
+            <a:r>
+              <a:rPr lang="en-US" altLang="zh-CN" sz="1200"/>
+              <a:t>          target: baseURL,</a:t>
+            </a:r>
+            <a:endParaRPr lang="en-US" altLang="zh-CN" sz="1200"/>
+          </a:p>
+          <a:p>
+            <a:r>
+              <a:rPr lang="en-US" altLang="zh-CN" sz="1200"/>
+              <a:t>          changeOrigin: true,</a:t>
+            </a:r>
+            <a:endParaRPr lang="en-US" altLang="zh-CN" sz="1200"/>
+          </a:p>
+          <a:p>
+            <a:r>
+              <a:rPr lang="en-US" altLang="zh-CN" sz="1200"/>
+              <a:t>          secure: false,</a:t>
+            </a:r>
+            <a:endParaRPr lang="en-US" altLang="zh-CN" sz="1200"/>
+          </a:p>
+          <a:p>
+            <a:r>
+              <a:rPr lang="en-US" altLang="zh-CN" sz="1200"/>
+              <a:t>          // Important: enable cookie forwarding</a:t>
+            </a:r>
+            <a:endParaRPr lang="en-US" altLang="zh-CN" sz="1200"/>
+          </a:p>
+          <a:p>
+            <a:r>
+              <a:rPr lang="en-US" altLang="zh-CN" sz="1200"/>
+              <a:t>          cookieDomainRewrite: '',</a:t>
+            </a:r>
+            <a:endParaRPr lang="en-US" altLang="zh-CN" sz="1200"/>
+          </a:p>
+          <a:p>
+            <a:r>
+              <a:rPr lang="en-US" altLang="zh-CN" sz="1200"/>
+              <a:t>          rewrite: path =&gt; path.replace(/^\/api/, '/api')</a:t>
+            </a:r>
+            <a:endParaRPr lang="en-US" altLang="zh-CN" sz="1200"/>
+          </a:p>
+          <a:p>
+            <a:r>
+              <a:rPr lang="en-US" altLang="zh-CN" sz="1200"/>
+              <a:t>        }</a:t>
+            </a:r>
+            <a:endParaRPr lang="en-US" altLang="zh-CN" sz="1200"/>
+          </a:p>
+          <a:p>
+            <a:r>
+              <a:rPr lang="en-US" altLang="zh-CN" sz="1200"/>
+              <a:t>     }</a:t>
+            </a:r>
+            <a:endParaRPr lang="en-US" altLang="zh-CN" sz="1200"/>
+          </a:p>
+          <a:p>
+            <a:r>
+              <a:rPr lang="en-US" altLang="zh-CN" sz="1200"/>
+              <a:t>  },</a:t>
             </a:r>
             <a:endParaRPr lang="en-US" altLang="zh-CN" sz="1200"/>
           </a:p>
